--- a/Labs/lab31 frequencyDomain audioFilter/activeFilters.pptx
+++ b/Labs/lab31 frequencyDomain audioFilter/activeFilters.pptx
@@ -216,7 +216,7 @@
           <a:p>
             <a:fld id="{E4DD5C9C-88A3-CA43-B162-DCC4E1E4BE7D}" type="datetimeFigureOut">
               <a:rPr lang="en-US" smtClean="0"/>
-              <a:t>4/12/2024</a:t>
+              <a:t>7/21/2026</a:t>
             </a:fld>
             <a:endParaRPr lang="en-US"/>
           </a:p>
@@ -381,7 +381,7 @@
           <a:p>
             <a:fld id="{BC5E4000-89B6-4F22-834E-B172C4AA57D1}" type="datetimeFigureOut">
               <a:rPr lang="en-US" smtClean="0"/>
-              <a:t>4/12/2024</a:t>
+              <a:t>7/21/2026</a:t>
             </a:fld>
             <a:endParaRPr lang="en-US"/>
           </a:p>
@@ -1864,7 +1864,7 @@
           <a:p>
             <a:fld id="{8923E60E-3077-9A4D-B784-FBCD6B1A2E3F}" type="datetimeFigureOut">
               <a:rPr lang="en-US" smtClean="0"/>
-              <a:t>4/12/2024</a:t>
+              <a:t>7/21/2026</a:t>
             </a:fld>
             <a:endParaRPr lang="en-US"/>
           </a:p>
@@ -2480,7 +2480,7 @@
           <a:p>
             <a:fld id="{8923E60E-3077-9A4D-B784-FBCD6B1A2E3F}" type="datetimeFigureOut">
               <a:rPr lang="en-US" smtClean="0"/>
-              <a:t>4/12/2024</a:t>
+              <a:t>7/21/2026</a:t>
             </a:fld>
             <a:endParaRPr lang="en-US"/>
           </a:p>
@@ -2957,7 +2957,7 @@
           <a:p>
             <a:fld id="{8923E60E-3077-9A4D-B784-FBCD6B1A2E3F}" type="datetimeFigureOut">
               <a:rPr lang="en-US" smtClean="0"/>
-              <a:t>4/12/2024</a:t>
+              <a:t>7/21/2026</a:t>
             </a:fld>
             <a:endParaRPr lang="en-US"/>
           </a:p>
@@ -3194,7 +3194,7 @@
           <a:p>
             <a:fld id="{8923E60E-3077-9A4D-B784-FBCD6B1A2E3F}" type="datetimeFigureOut">
               <a:rPr lang="en-US" smtClean="0"/>
-              <a:t>4/12/2024</a:t>
+              <a:t>7/21/2026</a:t>
             </a:fld>
             <a:endParaRPr lang="en-US"/>
           </a:p>
@@ -3549,7 +3549,7 @@
           <a:p>
             <a:fld id="{8923E60E-3077-9A4D-B784-FBCD6B1A2E3F}" type="datetimeFigureOut">
               <a:rPr lang="en-US" smtClean="0"/>
-              <a:t>4/12/2024</a:t>
+              <a:t>7/21/2026</a:t>
             </a:fld>
             <a:endParaRPr lang="en-US"/>
           </a:p>
@@ -4016,7 +4016,7 @@
           <a:p>
             <a:fld id="{8923E60E-3077-9A4D-B784-FBCD6B1A2E3F}" type="datetimeFigureOut">
               <a:rPr lang="en-US" smtClean="0"/>
-              <a:t>4/12/2024</a:t>
+              <a:t>7/21/2026</a:t>
             </a:fld>
             <a:endParaRPr lang="en-US"/>
           </a:p>
@@ -4361,7 +4361,7 @@
           <a:p>
             <a:fld id="{8923E60E-3077-9A4D-B784-FBCD6B1A2E3F}" type="datetimeFigureOut">
               <a:rPr lang="en-US" smtClean="0"/>
-              <a:t>4/12/2024</a:t>
+              <a:t>7/21/2026</a:t>
             </a:fld>
             <a:endParaRPr lang="en-US"/>
           </a:p>
@@ -4718,7 +4718,7 @@
           <a:p>
             <a:fld id="{8923E60E-3077-9A4D-B784-FBCD6B1A2E3F}" type="datetimeFigureOut">
               <a:rPr lang="en-US" smtClean="0"/>
-              <a:t>4/12/2024</a:t>
+              <a:t>7/21/2026</a:t>
             </a:fld>
             <a:endParaRPr lang="en-US"/>
           </a:p>
@@ -5259,7 +5259,7 @@
           <a:p>
             <a:fld id="{8923E60E-3077-9A4D-B784-FBCD6B1A2E3F}" type="datetimeFigureOut">
               <a:rPr lang="en-US" smtClean="0"/>
-              <a:t>4/12/2024</a:t>
+              <a:t>7/21/2026</a:t>
             </a:fld>
             <a:endParaRPr lang="en-US"/>
           </a:p>
@@ -5553,7 +5553,7 @@
           <a:p>
             <a:fld id="{8923E60E-3077-9A4D-B784-FBCD6B1A2E3F}" type="datetimeFigureOut">
               <a:rPr lang="en-US" smtClean="0"/>
-              <a:t>4/12/2024</a:t>
+              <a:t>7/21/2026</a:t>
             </a:fld>
             <a:endParaRPr lang="en-US"/>
           </a:p>
@@ -5817,7 +5817,7 @@
           <a:p>
             <a:fld id="{8923E60E-3077-9A4D-B784-FBCD6B1A2E3F}" type="datetimeFigureOut">
               <a:rPr lang="en-US" smtClean="0"/>
-              <a:t>4/12/2024</a:t>
+              <a:t>7/21/2026</a:t>
             </a:fld>
             <a:endParaRPr lang="en-US"/>
           </a:p>
@@ -6890,15 +6890,7 @@
           <a:p>
             <a:r>
               <a:rPr lang="en-US" dirty="0"/>
-              <a:t>How to: </a:t>
-            </a:r>
-            <a:r>
-              <a:rPr lang="en-US" dirty="0" err="1"/>
-              <a:t>MultiSim</a:t>
-            </a:r>
-            <a:r>
-              <a:rPr lang="en-US" dirty="0"/>
-              <a:t> Frequency Sweep</a:t>
+              <a:t>How to: LTspice Frequency Sweep</a:t>
             </a:r>
           </a:p>
         </p:txBody>
@@ -6927,21 +6919,21 @@
           <a:p>
             <a:r>
               <a:rPr lang="en-US" sz="2800" dirty="0"/>
-              <a:t>Build model in </a:t>
-            </a:r>
-            <a:r>
-              <a:rPr lang="en-US" sz="2800" dirty="0" err="1"/>
-              <a:t>MultiSim</a:t>
-            </a:r>
+              <a:t>Build model in LTspice</a:t>
+            </a:r>
+          </a:p>
+          <a:p>
             <a:r>
               <a:rPr lang="en-US" sz="2800" dirty="0"/>
-              <a:t> Live</a:t>
-            </a:r>
-          </a:p>
-          <a:p>
+              <a:t>Use AC </a:t>
+            </a:r>
+            <a:r>
+              <a:rPr lang="en-US" dirty="0"/>
+              <a:t>Analysis</a:t>
+            </a:r>
             <a:r>
               <a:rPr lang="en-US" sz="2800" dirty="0"/>
-              <a:t>Use AC sweep tool</a:t>
+              <a:t> tool</a:t>
             </a:r>
           </a:p>
           <a:p>
@@ -6984,10 +6976,10 @@
       </p:sp>
       <p:pic>
         <p:nvPicPr>
-          <p:cNvPr id="5" name="Picture 4">
+          <p:cNvPr id="6" name="Picture 5">
             <a:extLst>
               <a:ext uri="{FF2B5EF4-FFF2-40B4-BE49-F238E27FC236}">
-                <a16:creationId xmlns:a16="http://schemas.microsoft.com/office/drawing/2014/main" id="{FF63737B-B2DD-A475-9C02-3F6BB60D6D6D}"/>
+                <a16:creationId xmlns:a16="http://schemas.microsoft.com/office/drawing/2014/main" id="{923BC033-6206-AF7E-58CD-F4D93FC7EC3E}"/>
               </a:ext>
             </a:extLst>
           </p:cNvPr>
@@ -7004,8 +6996,8 @@
         </p:blipFill>
         <p:spPr>
           <a:xfrm>
-            <a:off x="5925502" y="2080260"/>
-            <a:ext cx="5880177" cy="2930525"/>
+            <a:off x="1823969" y="2749659"/>
+            <a:ext cx="5465594" cy="2678515"/>
           </a:xfrm>
           <a:prstGeom prst="rect">
             <a:avLst/>
@@ -7777,36 +7769,6 @@
           </a:p>
         </p:txBody>
       </p:sp>
-      <p:pic>
-        <p:nvPicPr>
-          <p:cNvPr id="4" name="Content Placeholder 4" descr="A white sign with red and blue text&#10;&#10;Description automatically generated">
-            <a:extLst>
-              <a:ext uri="{FF2B5EF4-FFF2-40B4-BE49-F238E27FC236}">
-                <a16:creationId xmlns:a16="http://schemas.microsoft.com/office/drawing/2014/main" id="{2E8EE5EB-CC59-FEA0-7757-FC323A4585E0}"/>
-              </a:ext>
-            </a:extLst>
-          </p:cNvPr>
-          <p:cNvPicPr>
-            <a:picLocks noChangeAspect="1"/>
-          </p:cNvPicPr>
-          <p:nvPr/>
-        </p:nvPicPr>
-        <p:blipFill>
-          <a:blip r:embed="rId3"/>
-          <a:stretch>
-            <a:fillRect/>
-          </a:stretch>
-        </p:blipFill>
-        <p:spPr>
-          <a:xfrm>
-            <a:off x="9360974" y="2898475"/>
-            <a:ext cx="2533376" cy="3278487"/>
-          </a:xfrm>
-          <a:prstGeom prst="rect">
-            <a:avLst/>
-          </a:prstGeom>
-        </p:spPr>
-      </p:pic>
     </p:spTree>
     <p:extLst>
       <p:ext uri="{BB962C8B-B14F-4D97-AF65-F5344CB8AC3E}">
@@ -8824,10 +8786,10 @@
       </p:sp>
       <p:pic>
         <p:nvPicPr>
-          <p:cNvPr id="4" name="Picture 3">
+          <p:cNvPr id="5" name="Picture 4">
             <a:extLst>
               <a:ext uri="{FF2B5EF4-FFF2-40B4-BE49-F238E27FC236}">
-                <a16:creationId xmlns:a16="http://schemas.microsoft.com/office/drawing/2014/main" id="{97AEA1AF-96AE-EA7D-3D4D-5F2E2F4F0B06}"/>
+                <a16:creationId xmlns:a16="http://schemas.microsoft.com/office/drawing/2014/main" id="{E2F85986-0550-FA22-6049-A3B94DC27EA1}"/>
               </a:ext>
             </a:extLst>
           </p:cNvPr>
@@ -8844,8 +8806,8 @@
         </p:blipFill>
         <p:spPr>
           <a:xfrm>
-            <a:off x="1196766" y="3308199"/>
-            <a:ext cx="5308965" cy="2645848"/>
+            <a:off x="1071939" y="3296590"/>
+            <a:ext cx="5465594" cy="2678515"/>
           </a:xfrm>
           <a:prstGeom prst="rect">
             <a:avLst/>
@@ -8940,29 +8902,13 @@
           <a:p>
             <a:r>
               <a:rPr lang="en-US" sz="2800" dirty="0"/>
-              <a:t>Simulation: </a:t>
-            </a:r>
-            <a:r>
-              <a:rPr lang="en-US" sz="2800" dirty="0" err="1"/>
-              <a:t>MultiSim</a:t>
-            </a:r>
+              <a:t>Simulation: LTspice Time Domain</a:t>
+            </a:r>
+          </a:p>
+          <a:p>
             <a:r>
               <a:rPr lang="en-US" sz="2800" dirty="0"/>
-              <a:t> Live Time Domain</a:t>
-            </a:r>
-          </a:p>
-          <a:p>
-            <a:r>
-              <a:rPr lang="en-US" sz="2800" dirty="0"/>
-              <a:t>Simulation: </a:t>
-            </a:r>
-            <a:r>
-              <a:rPr lang="en-US" sz="2800" dirty="0" err="1"/>
-              <a:t>MultiSim</a:t>
-            </a:r>
-            <a:r>
-              <a:rPr lang="en-US" sz="2800" dirty="0"/>
-              <a:t> Live Frequency Sweep</a:t>
+              <a:t>Simulation: LTspice Frequency Sweep</a:t>
             </a:r>
           </a:p>
           <a:p>
@@ -9391,15 +9337,7 @@
           <a:p>
             <a:r>
               <a:rPr lang="en-US" dirty="0"/>
-              <a:t>How to: </a:t>
-            </a:r>
-            <a:r>
-              <a:rPr lang="en-US" dirty="0" err="1"/>
-              <a:t>MultiSim</a:t>
-            </a:r>
-            <a:r>
-              <a:rPr lang="en-US" dirty="0"/>
-              <a:t> Point-by-point</a:t>
+              <a:t>How to: LTspice Point-by-point</a:t>
             </a:r>
           </a:p>
         </p:txBody>
@@ -9428,15 +9366,7 @@
           <a:p>
             <a:r>
               <a:rPr lang="en-US" sz="2800" dirty="0"/>
-              <a:t>Build model in </a:t>
-            </a:r>
-            <a:r>
-              <a:rPr lang="en-US" sz="2800" dirty="0" err="1"/>
-              <a:t>MultiSim</a:t>
-            </a:r>
-            <a:r>
-              <a:rPr lang="en-US" sz="2800" dirty="0"/>
-              <a:t> Live</a:t>
+              <a:t>Build model in LTspice</a:t>
             </a:r>
           </a:p>
           <a:p>
@@ -9482,10 +9412,10 @@
       </p:sp>
       <p:pic>
         <p:nvPicPr>
-          <p:cNvPr id="4" name="Picture 3">
+          <p:cNvPr id="5" name="Picture 4">
             <a:extLst>
               <a:ext uri="{FF2B5EF4-FFF2-40B4-BE49-F238E27FC236}">
-                <a16:creationId xmlns:a16="http://schemas.microsoft.com/office/drawing/2014/main" id="{83E2C2D5-A284-8CA5-3763-D727A64A4001}"/>
+                <a16:creationId xmlns:a16="http://schemas.microsoft.com/office/drawing/2014/main" id="{7F5E1C2C-BE2F-FB36-71D3-7E4DB2207A0C}"/>
               </a:ext>
             </a:extLst>
           </p:cNvPr>
@@ -9502,8 +9432,8 @@
         </p:blipFill>
         <p:spPr>
           <a:xfrm>
-            <a:off x="7238119" y="1977907"/>
-            <a:ext cx="4115681" cy="2902185"/>
+            <a:off x="1610325" y="2880621"/>
+            <a:ext cx="5946140" cy="1336040"/>
           </a:xfrm>
           <a:prstGeom prst="rect">
             <a:avLst/>
